--- a/cursos/recursos/arbitro-nacional/13-el-sistema-suizo-los-principios-del-sistema-holandes-dutch.pptx
+++ b/cursos/recursos/arbitro-nacional/13-el-sistema-suizo-los-principios-del-sistema-holandes-dutch.pptx
@@ -3955,7 +3955,7 @@
                 </a:solidFill>
                 <a:latin typeface="Calibri"/>
               </a:rPr>
-              <a:t>Dos restricciones son absolutas y no se pueden ceder por conveniencia: no repetir un enfrentamiento ya jugado, y no dar a nadie el mismo color tres veces seguidas. Todo lo demás (equilibrar colores, minimizar la diferencia de puntaje entre emparejados) es una prioridad que se ajusta cuando choca con esas dos reglas absolutas.</a:t>
+              <a:t>Una sola restricción es absoluta de verdad, sin ninguna excepción: no repetir un enfrentamiento ya jugado (C.04.1.b). "No dar a nadie el mismo color tres veces seguidas" es la regla general (C.04.1.f), pero el propio reglamento deja abierta una excepción en la última ronda del torneo — no tiene el mismo peso que la anterior, aunque en la práctica casi nunca haga falta usarla. Todo lo demás (equilibrar colores, minimizar la diferencia de puntaje entre emparejados) es una prioridad que se ajusta cuando choca con la regla que sí es absoluta.</a:t>
             </a:r>
           </a:p>
         </p:txBody>
